--- a/CNTT_2021605089_Nguyen_Duc_Xuan.pptx
+++ b/CNTT_2021605089_Nguyen_Duc_Xuan.pptx
@@ -241,7 +241,7 @@
           <a:p>
             <a:fld id="{C329B427-3E73-4F6F-BF7E-0BB7027715CA}" type="datetimeFigureOut">
               <a:rPr lang="en-US" smtClean="0"/>
-              <a:t>5/31/2025</a:t>
+              <a:t>6/1/2025</a:t>
             </a:fld>
             <a:endParaRPr lang="en-US"/>
           </a:p>
@@ -409,7 +409,7 @@
           <a:p>
             <a:fld id="{C329B427-3E73-4F6F-BF7E-0BB7027715CA}" type="datetimeFigureOut">
               <a:rPr lang="en-US" smtClean="0"/>
-              <a:t>5/31/2025</a:t>
+              <a:t>6/1/2025</a:t>
             </a:fld>
             <a:endParaRPr lang="en-US"/>
           </a:p>
@@ -587,7 +587,7 @@
           <a:p>
             <a:fld id="{C329B427-3E73-4F6F-BF7E-0BB7027715CA}" type="datetimeFigureOut">
               <a:rPr lang="en-US" smtClean="0"/>
-              <a:t>5/31/2025</a:t>
+              <a:t>6/1/2025</a:t>
             </a:fld>
             <a:endParaRPr lang="en-US"/>
           </a:p>
@@ -755,7 +755,7 @@
           <a:p>
             <a:fld id="{C329B427-3E73-4F6F-BF7E-0BB7027715CA}" type="datetimeFigureOut">
               <a:rPr lang="en-US" smtClean="0"/>
-              <a:t>5/31/2025</a:t>
+              <a:t>6/1/2025</a:t>
             </a:fld>
             <a:endParaRPr lang="en-US"/>
           </a:p>
@@ -1000,7 +1000,7 @@
           <a:p>
             <a:fld id="{C329B427-3E73-4F6F-BF7E-0BB7027715CA}" type="datetimeFigureOut">
               <a:rPr lang="en-US" smtClean="0"/>
-              <a:t>5/31/2025</a:t>
+              <a:t>6/1/2025</a:t>
             </a:fld>
             <a:endParaRPr lang="en-US"/>
           </a:p>
@@ -1229,7 +1229,7 @@
           <a:p>
             <a:fld id="{C329B427-3E73-4F6F-BF7E-0BB7027715CA}" type="datetimeFigureOut">
               <a:rPr lang="en-US" smtClean="0"/>
-              <a:t>5/31/2025</a:t>
+              <a:t>6/1/2025</a:t>
             </a:fld>
             <a:endParaRPr lang="en-US"/>
           </a:p>
@@ -1593,7 +1593,7 @@
           <a:p>
             <a:fld id="{C329B427-3E73-4F6F-BF7E-0BB7027715CA}" type="datetimeFigureOut">
               <a:rPr lang="en-US" smtClean="0"/>
-              <a:t>5/31/2025</a:t>
+              <a:t>6/1/2025</a:t>
             </a:fld>
             <a:endParaRPr lang="en-US"/>
           </a:p>
@@ -1710,7 +1710,7 @@
           <a:p>
             <a:fld id="{C329B427-3E73-4F6F-BF7E-0BB7027715CA}" type="datetimeFigureOut">
               <a:rPr lang="en-US" smtClean="0"/>
-              <a:t>5/31/2025</a:t>
+              <a:t>6/1/2025</a:t>
             </a:fld>
             <a:endParaRPr lang="en-US"/>
           </a:p>
@@ -1805,7 +1805,7 @@
           <a:p>
             <a:fld id="{C329B427-3E73-4F6F-BF7E-0BB7027715CA}" type="datetimeFigureOut">
               <a:rPr lang="en-US" smtClean="0"/>
-              <a:t>5/31/2025</a:t>
+              <a:t>6/1/2025</a:t>
             </a:fld>
             <a:endParaRPr lang="en-US"/>
           </a:p>
@@ -2080,7 +2080,7 @@
           <a:p>
             <a:fld id="{C329B427-3E73-4F6F-BF7E-0BB7027715CA}" type="datetimeFigureOut">
               <a:rPr lang="en-US" smtClean="0"/>
-              <a:t>5/31/2025</a:t>
+              <a:t>6/1/2025</a:t>
             </a:fld>
             <a:endParaRPr lang="en-US"/>
           </a:p>
@@ -2332,7 +2332,7 @@
           <a:p>
             <a:fld id="{C329B427-3E73-4F6F-BF7E-0BB7027715CA}" type="datetimeFigureOut">
               <a:rPr lang="en-US" smtClean="0"/>
-              <a:t>5/31/2025</a:t>
+              <a:t>6/1/2025</a:t>
             </a:fld>
             <a:endParaRPr lang="en-US"/>
           </a:p>
@@ -2543,7 +2543,7 @@
           <a:p>
             <a:fld id="{C329B427-3E73-4F6F-BF7E-0BB7027715CA}" type="datetimeFigureOut">
               <a:rPr lang="en-US" smtClean="0"/>
-              <a:t>5/31/2025</a:t>
+              <a:t>6/1/2025</a:t>
             </a:fld>
             <a:endParaRPr lang="en-US"/>
           </a:p>
@@ -5388,6 +5388,135 @@
           </a:p>
         </p:txBody>
       </p:sp>
+      <p:cxnSp>
+        <p:nvCxnSpPr>
+          <p:cNvPr id="2" name="Straight Connector 1">
+            <a:extLst>
+              <a:ext uri="{FF2B5EF4-FFF2-40B4-BE49-F238E27FC236}">
+                <a16:creationId xmlns:a16="http://schemas.microsoft.com/office/drawing/2014/main" id="{F406806C-3DBC-AF58-E8B5-8B013E780D4B}"/>
+              </a:ext>
+            </a:extLst>
+          </p:cNvPr>
+          <p:cNvCxnSpPr>
+            <a:cxnSpLocks/>
+          </p:cNvCxnSpPr>
+          <p:nvPr/>
+        </p:nvCxnSpPr>
+        <p:spPr>
+          <a:xfrm flipH="1">
+            <a:off x="1086351" y="614696"/>
+            <a:ext cx="10839837" cy="0"/>
+          </a:xfrm>
+          <a:prstGeom prst="line">
+            <a:avLst/>
+          </a:prstGeom>
+          <a:ln w="19050">
+            <a:solidFill>
+              <a:srgbClr val="FFF2D7"/>
+            </a:solidFill>
+          </a:ln>
+        </p:spPr>
+        <p:style>
+          <a:lnRef idx="1">
+            <a:schemeClr val="accent1"/>
+          </a:lnRef>
+          <a:fillRef idx="0">
+            <a:schemeClr val="accent1"/>
+          </a:fillRef>
+          <a:effectRef idx="0">
+            <a:schemeClr val="accent1"/>
+          </a:effectRef>
+          <a:fontRef idx="minor">
+            <a:schemeClr val="tx1"/>
+          </a:fontRef>
+        </p:style>
+      </p:cxnSp>
+      <p:cxnSp>
+        <p:nvCxnSpPr>
+          <p:cNvPr id="13" name="Straight Connector 12">
+            <a:extLst>
+              <a:ext uri="{FF2B5EF4-FFF2-40B4-BE49-F238E27FC236}">
+                <a16:creationId xmlns:a16="http://schemas.microsoft.com/office/drawing/2014/main" id="{086BD29D-8E3E-C7EC-1EB6-05F07C76F39D}"/>
+              </a:ext>
+            </a:extLst>
+          </p:cNvPr>
+          <p:cNvCxnSpPr>
+            <a:cxnSpLocks/>
+          </p:cNvCxnSpPr>
+          <p:nvPr/>
+        </p:nvCxnSpPr>
+        <p:spPr>
+          <a:xfrm flipH="1">
+            <a:off x="-12412" y="-240711"/>
+            <a:ext cx="12428430" cy="0"/>
+          </a:xfrm>
+          <a:prstGeom prst="line">
+            <a:avLst/>
+          </a:prstGeom>
+          <a:ln w="38100">
+            <a:solidFill>
+              <a:srgbClr val="F98866"/>
+            </a:solidFill>
+          </a:ln>
+        </p:spPr>
+        <p:style>
+          <a:lnRef idx="1">
+            <a:schemeClr val="accent1"/>
+          </a:lnRef>
+          <a:fillRef idx="0">
+            <a:schemeClr val="accent1"/>
+          </a:fillRef>
+          <a:effectRef idx="0">
+            <a:schemeClr val="accent1"/>
+          </a:effectRef>
+          <a:fontRef idx="minor">
+            <a:schemeClr val="tx1"/>
+          </a:fontRef>
+        </p:style>
+      </p:cxnSp>
+      <p:cxnSp>
+        <p:nvCxnSpPr>
+          <p:cNvPr id="30" name="Straight Connector 29">
+            <a:extLst>
+              <a:ext uri="{FF2B5EF4-FFF2-40B4-BE49-F238E27FC236}">
+                <a16:creationId xmlns:a16="http://schemas.microsoft.com/office/drawing/2014/main" id="{AD64F88E-B736-97E9-1A89-A17B6DACCA30}"/>
+              </a:ext>
+            </a:extLst>
+          </p:cNvPr>
+          <p:cNvCxnSpPr>
+            <a:cxnSpLocks/>
+          </p:cNvCxnSpPr>
+          <p:nvPr/>
+        </p:nvCxnSpPr>
+        <p:spPr>
+          <a:xfrm flipH="1">
+            <a:off x="-12412" y="-137472"/>
+            <a:ext cx="12428430" cy="0"/>
+          </a:xfrm>
+          <a:prstGeom prst="line">
+            <a:avLst/>
+          </a:prstGeom>
+          <a:ln w="38100">
+            <a:solidFill>
+              <a:srgbClr val="F98866"/>
+            </a:solidFill>
+          </a:ln>
+        </p:spPr>
+        <p:style>
+          <a:lnRef idx="1">
+            <a:schemeClr val="accent1"/>
+          </a:lnRef>
+          <a:fillRef idx="0">
+            <a:schemeClr val="accent1"/>
+          </a:fillRef>
+          <a:effectRef idx="0">
+            <a:schemeClr val="accent1"/>
+          </a:effectRef>
+          <a:fontRef idx="minor">
+            <a:schemeClr val="tx1"/>
+          </a:fontRef>
+        </p:style>
+      </p:cxnSp>
     </p:spTree>
     <p:extLst>
       <p:ext uri="{BB962C8B-B14F-4D97-AF65-F5344CB8AC3E}">
